--- a/6.CICD/2.CICD gitlab/Les pipelines.pptx
+++ b/6.CICD/2.CICD gitlab/Les pipelines.pptx
@@ -242,7 +242,7 @@
           <a:p>
             <a:fld id="{D2B9BB29-2F69-4BAD-BAE6-35EBE787D585}" type="datetimeFigureOut">
               <a:rPr lang="fr-FR" smtClean="0"/>
-              <a:t>06/06/2025</a:t>
+              <a:t>07/03/2026</a:t>
             </a:fld>
             <a:endParaRPr lang="fr-FR"/>
           </a:p>
@@ -998,6 +998,977 @@
 </p:notes>
 </file>
 
+<file path=ppt/notesSlides/notesSlide10.xml><?xml version="1.0" encoding="utf-8"?>
+<p:notes xmlns:a="http://schemas.openxmlformats.org/drawingml/2006/main" xmlns:r="http://schemas.openxmlformats.org/officeDocument/2006/relationships" xmlns:p="http://schemas.openxmlformats.org/presentationml/2006/main">
+  <p:cSld>
+    <p:spTree>
+      <p:nvGrpSpPr>
+        <p:cNvPr id="1" name=""/>
+        <p:cNvGrpSpPr/>
+        <p:nvPr/>
+      </p:nvGrpSpPr>
+      <p:grpSpPr>
+        <a:xfrm>
+          <a:off x="0" y="0"/>
+          <a:ext cx="0" cy="0"/>
+          <a:chOff x="0" y="0"/>
+          <a:chExt cx="0" cy="0"/>
+        </a:xfrm>
+      </p:grpSpPr>
+      <p:sp>
+        <p:nvSpPr>
+          <p:cNvPr id="2" name="Slide Image Placeholder 1"/>
+          <p:cNvSpPr>
+            <a:spLocks noGrp="1" noRot="1" noChangeAspect="1"/>
+          </p:cNvSpPr>
+          <p:nvPr>
+            <p:ph type="sldImg"/>
+          </p:nvPr>
+        </p:nvSpPr>
+        <p:spPr/>
+      </p:sp>
+      <p:sp>
+        <p:nvSpPr>
+          <p:cNvPr id="3" name="Notes Placeholder 2"/>
+          <p:cNvSpPr>
+            <a:spLocks noGrp="1"/>
+          </p:cNvSpPr>
+          <p:nvPr>
+            <p:ph type="body" idx="1"/>
+          </p:nvPr>
+        </p:nvSpPr>
+        <p:spPr/>
+        <p:txBody>
+          <a:bodyPr/>
+          <a:lstStyle/>
+          <a:p>
+            <a:endParaRPr lang="en-US" dirty="0"/>
+          </a:p>
+        </p:txBody>
+      </p:sp>
+      <p:sp>
+        <p:nvSpPr>
+          <p:cNvPr id="4" name="Slide Number Placeholder 3"/>
+          <p:cNvSpPr>
+            <a:spLocks noGrp="1"/>
+          </p:cNvSpPr>
+          <p:nvPr>
+            <p:ph type="sldNum" sz="quarter" idx="10"/>
+          </p:nvPr>
+        </p:nvSpPr>
+        <p:spPr/>
+        <p:txBody>
+          <a:bodyPr/>
+          <a:lstStyle/>
+          <a:p>
+            <a:fld id="{508E1986-C91B-477C-93E3-239B6FF79C49}" type="slidenum">
+              <a:rPr lang="fr-FR" smtClean="0"/>
+              <a:t>28</a:t>
+            </a:fld>
+            <a:endParaRPr lang="fr-FR"/>
+          </a:p>
+        </p:txBody>
+      </p:sp>
+    </p:spTree>
+    <p:extLst>
+      <p:ext uri="{BB962C8B-B14F-4D97-AF65-F5344CB8AC3E}">
+        <p14:creationId xmlns:p14="http://schemas.microsoft.com/office/powerpoint/2010/main" val="1856064829"/>
+      </p:ext>
+    </p:extLst>
+  </p:cSld>
+  <p:clrMapOvr>
+    <a:masterClrMapping/>
+  </p:clrMapOvr>
+</p:notes>
+</file>
+
+<file path=ppt/notesSlides/notesSlide11.xml><?xml version="1.0" encoding="utf-8"?>
+<p:notes xmlns:a="http://schemas.openxmlformats.org/drawingml/2006/main" xmlns:r="http://schemas.openxmlformats.org/officeDocument/2006/relationships" xmlns:p="http://schemas.openxmlformats.org/presentationml/2006/main">
+  <p:cSld>
+    <p:spTree>
+      <p:nvGrpSpPr>
+        <p:cNvPr id="1" name=""/>
+        <p:cNvGrpSpPr/>
+        <p:nvPr/>
+      </p:nvGrpSpPr>
+      <p:grpSpPr>
+        <a:xfrm>
+          <a:off x="0" y="0"/>
+          <a:ext cx="0" cy="0"/>
+          <a:chOff x="0" y="0"/>
+          <a:chExt cx="0" cy="0"/>
+        </a:xfrm>
+      </p:grpSpPr>
+      <p:sp>
+        <p:nvSpPr>
+          <p:cNvPr id="2" name="Slide Image Placeholder 1"/>
+          <p:cNvSpPr>
+            <a:spLocks noGrp="1" noRot="1" noChangeAspect="1"/>
+          </p:cNvSpPr>
+          <p:nvPr>
+            <p:ph type="sldImg"/>
+          </p:nvPr>
+        </p:nvSpPr>
+        <p:spPr/>
+      </p:sp>
+      <p:sp>
+        <p:nvSpPr>
+          <p:cNvPr id="3" name="Notes Placeholder 2"/>
+          <p:cNvSpPr>
+            <a:spLocks noGrp="1"/>
+          </p:cNvSpPr>
+          <p:nvPr>
+            <p:ph type="body" idx="1"/>
+          </p:nvPr>
+        </p:nvSpPr>
+        <p:spPr/>
+        <p:txBody>
+          <a:bodyPr/>
+          <a:lstStyle/>
+          <a:p>
+            <a:r>
+              <a:rPr lang="en-US" sz="1200" b="0" kern="1200" dirty="0" smtClean="0">
+                <a:solidFill>
+                  <a:schemeClr val="tx1"/>
+                </a:solidFill>
+                <a:effectLst/>
+                <a:latin typeface="+mn-lt"/>
+                <a:ea typeface="+mn-ea"/>
+                <a:cs typeface="+mn-cs"/>
+              </a:rPr>
+              <a:t>stages:</a:t>
+            </a:r>
+          </a:p>
+          <a:p>
+            <a:r>
+              <a:rPr lang="en-US" sz="1200" b="0" kern="1200" dirty="0" smtClean="0">
+                <a:solidFill>
+                  <a:schemeClr val="tx1"/>
+                </a:solidFill>
+                <a:effectLst/>
+                <a:latin typeface="+mn-lt"/>
+                <a:ea typeface="+mn-ea"/>
+                <a:cs typeface="+mn-cs"/>
+              </a:rPr>
+              <a:t>  - build</a:t>
+            </a:r>
+          </a:p>
+          <a:p>
+            <a:r>
+              <a:rPr lang="en-US" sz="1200" b="0" kern="1200" dirty="0" smtClean="0">
+                <a:solidFill>
+                  <a:schemeClr val="tx1"/>
+                </a:solidFill>
+                <a:effectLst/>
+                <a:latin typeface="+mn-lt"/>
+                <a:ea typeface="+mn-ea"/>
+                <a:cs typeface="+mn-cs"/>
+              </a:rPr>
+              <a:t>  - stage</a:t>
+            </a:r>
+          </a:p>
+          <a:p>
+            <a:r>
+              <a:rPr lang="en-US" sz="1200" b="0" kern="1200" dirty="0" smtClean="0">
+                <a:solidFill>
+                  <a:schemeClr val="tx1"/>
+                </a:solidFill>
+                <a:effectLst/>
+                <a:latin typeface="+mn-lt"/>
+                <a:ea typeface="+mn-ea"/>
+                <a:cs typeface="+mn-cs"/>
+              </a:rPr>
+              <a:t>  - deploy</a:t>
+            </a:r>
+          </a:p>
+          <a:p>
+            <a:r>
+              <a:rPr lang="en-US" sz="1200" b="0" kern="1200" dirty="0" smtClean="0">
+                <a:solidFill>
+                  <a:schemeClr val="tx1"/>
+                </a:solidFill>
+                <a:effectLst/>
+                <a:latin typeface="+mn-lt"/>
+                <a:ea typeface="+mn-ea"/>
+                <a:cs typeface="+mn-cs"/>
+              </a:rPr>
+              <a:t/>
+            </a:r>
+            <a:br>
+              <a:rPr lang="en-US" sz="1200" b="0" kern="1200" dirty="0" smtClean="0">
+                <a:solidFill>
+                  <a:schemeClr val="tx1"/>
+                </a:solidFill>
+                <a:effectLst/>
+                <a:latin typeface="+mn-lt"/>
+                <a:ea typeface="+mn-ea"/>
+                <a:cs typeface="+mn-cs"/>
+              </a:rPr>
+            </a:br>
+            <a:r>
+              <a:rPr lang="en-US" sz="1200" b="0" kern="1200" dirty="0" err="1" smtClean="0">
+                <a:solidFill>
+                  <a:schemeClr val="tx1"/>
+                </a:solidFill>
+                <a:effectLst/>
+                <a:latin typeface="+mn-lt"/>
+                <a:ea typeface="+mn-ea"/>
+                <a:cs typeface="+mn-cs"/>
+              </a:rPr>
+              <a:t>build_a</a:t>
+            </a:r>
+            <a:r>
+              <a:rPr lang="en-US" sz="1200" b="0" kern="1200" dirty="0" smtClean="0">
+                <a:solidFill>
+                  <a:schemeClr val="tx1"/>
+                </a:solidFill>
+                <a:effectLst/>
+                <a:latin typeface="+mn-lt"/>
+                <a:ea typeface="+mn-ea"/>
+                <a:cs typeface="+mn-cs"/>
+              </a:rPr>
+              <a:t>:</a:t>
+            </a:r>
+          </a:p>
+          <a:p>
+            <a:r>
+              <a:rPr lang="en-US" sz="1200" b="0" kern="1200" dirty="0" smtClean="0">
+                <a:solidFill>
+                  <a:schemeClr val="tx1"/>
+                </a:solidFill>
+                <a:effectLst/>
+                <a:latin typeface="+mn-lt"/>
+                <a:ea typeface="+mn-ea"/>
+                <a:cs typeface="+mn-cs"/>
+              </a:rPr>
+              <a:t>  stage: build</a:t>
+            </a:r>
+          </a:p>
+          <a:p>
+            <a:r>
+              <a:rPr lang="en-US" sz="1200" b="0" kern="1200" dirty="0" smtClean="0">
+                <a:solidFill>
+                  <a:schemeClr val="tx1"/>
+                </a:solidFill>
+                <a:effectLst/>
+                <a:latin typeface="+mn-lt"/>
+                <a:ea typeface="+mn-ea"/>
+                <a:cs typeface="+mn-cs"/>
+              </a:rPr>
+              <a:t>  script:</a:t>
+            </a:r>
+          </a:p>
+          <a:p>
+            <a:r>
+              <a:rPr lang="en-US" sz="1200" b="0" kern="1200" dirty="0" smtClean="0">
+                <a:solidFill>
+                  <a:schemeClr val="tx1"/>
+                </a:solidFill>
+                <a:effectLst/>
+                <a:latin typeface="+mn-lt"/>
+                <a:ea typeface="+mn-ea"/>
+                <a:cs typeface="+mn-cs"/>
+              </a:rPr>
+              <a:t>    - echo "build a"</a:t>
+            </a:r>
+          </a:p>
+          <a:p>
+            <a:r>
+              <a:rPr lang="en-US" sz="1200" b="0" kern="1200" dirty="0" smtClean="0">
+                <a:solidFill>
+                  <a:schemeClr val="tx1"/>
+                </a:solidFill>
+                <a:effectLst/>
+                <a:latin typeface="+mn-lt"/>
+                <a:ea typeface="+mn-ea"/>
+                <a:cs typeface="+mn-cs"/>
+              </a:rPr>
+              <a:t/>
+            </a:r>
+            <a:br>
+              <a:rPr lang="en-US" sz="1200" b="0" kern="1200" dirty="0" smtClean="0">
+                <a:solidFill>
+                  <a:schemeClr val="tx1"/>
+                </a:solidFill>
+                <a:effectLst/>
+                <a:latin typeface="+mn-lt"/>
+                <a:ea typeface="+mn-ea"/>
+                <a:cs typeface="+mn-cs"/>
+              </a:rPr>
+            </a:br>
+            <a:r>
+              <a:rPr lang="en-US" sz="1200" b="0" kern="1200" dirty="0" err="1" smtClean="0">
+                <a:solidFill>
+                  <a:schemeClr val="tx1"/>
+                </a:solidFill>
+                <a:effectLst/>
+                <a:latin typeface="+mn-lt"/>
+                <a:ea typeface="+mn-ea"/>
+                <a:cs typeface="+mn-cs"/>
+              </a:rPr>
+              <a:t>build_b</a:t>
+            </a:r>
+            <a:r>
+              <a:rPr lang="en-US" sz="1200" b="0" kern="1200" dirty="0" smtClean="0">
+                <a:solidFill>
+                  <a:schemeClr val="tx1"/>
+                </a:solidFill>
+                <a:effectLst/>
+                <a:latin typeface="+mn-lt"/>
+                <a:ea typeface="+mn-ea"/>
+                <a:cs typeface="+mn-cs"/>
+              </a:rPr>
+              <a:t>:</a:t>
+            </a:r>
+          </a:p>
+          <a:p>
+            <a:r>
+              <a:rPr lang="en-US" sz="1200" b="0" kern="1200" dirty="0" smtClean="0">
+                <a:solidFill>
+                  <a:schemeClr val="tx1"/>
+                </a:solidFill>
+                <a:effectLst/>
+                <a:latin typeface="+mn-lt"/>
+                <a:ea typeface="+mn-ea"/>
+                <a:cs typeface="+mn-cs"/>
+              </a:rPr>
+              <a:t>  stage: build</a:t>
+            </a:r>
+          </a:p>
+          <a:p>
+            <a:r>
+              <a:rPr lang="en-US" sz="1200" b="0" kern="1200" dirty="0" smtClean="0">
+                <a:solidFill>
+                  <a:schemeClr val="tx1"/>
+                </a:solidFill>
+                <a:effectLst/>
+                <a:latin typeface="+mn-lt"/>
+                <a:ea typeface="+mn-ea"/>
+                <a:cs typeface="+mn-cs"/>
+              </a:rPr>
+              <a:t>  script:</a:t>
+            </a:r>
+          </a:p>
+          <a:p>
+            <a:r>
+              <a:rPr lang="en-US" sz="1200" b="0" kern="1200" dirty="0" smtClean="0">
+                <a:solidFill>
+                  <a:schemeClr val="tx1"/>
+                </a:solidFill>
+                <a:effectLst/>
+                <a:latin typeface="+mn-lt"/>
+                <a:ea typeface="+mn-ea"/>
+                <a:cs typeface="+mn-cs"/>
+              </a:rPr>
+              <a:t>    - echo "build b"</a:t>
+            </a:r>
+          </a:p>
+          <a:p>
+            <a:r>
+              <a:rPr lang="en-US" sz="1200" b="0" kern="1200" dirty="0" smtClean="0">
+                <a:solidFill>
+                  <a:schemeClr val="tx1"/>
+                </a:solidFill>
+                <a:effectLst/>
+                <a:latin typeface="+mn-lt"/>
+                <a:ea typeface="+mn-ea"/>
+                <a:cs typeface="+mn-cs"/>
+              </a:rPr>
+              <a:t/>
+            </a:r>
+            <a:br>
+              <a:rPr lang="en-US" sz="1200" b="0" kern="1200" dirty="0" smtClean="0">
+                <a:solidFill>
+                  <a:schemeClr val="tx1"/>
+                </a:solidFill>
+                <a:effectLst/>
+                <a:latin typeface="+mn-lt"/>
+                <a:ea typeface="+mn-ea"/>
+                <a:cs typeface="+mn-cs"/>
+              </a:rPr>
+            </a:br>
+            <a:r>
+              <a:rPr lang="en-US" sz="1200" b="0" kern="1200" dirty="0" err="1" smtClean="0">
+                <a:solidFill>
+                  <a:schemeClr val="tx1"/>
+                </a:solidFill>
+                <a:effectLst/>
+                <a:latin typeface="+mn-lt"/>
+                <a:ea typeface="+mn-ea"/>
+                <a:cs typeface="+mn-cs"/>
+              </a:rPr>
+              <a:t>build_c</a:t>
+            </a:r>
+            <a:r>
+              <a:rPr lang="en-US" sz="1200" b="0" kern="1200" dirty="0" smtClean="0">
+                <a:solidFill>
+                  <a:schemeClr val="tx1"/>
+                </a:solidFill>
+                <a:effectLst/>
+                <a:latin typeface="+mn-lt"/>
+                <a:ea typeface="+mn-ea"/>
+                <a:cs typeface="+mn-cs"/>
+              </a:rPr>
+              <a:t>:</a:t>
+            </a:r>
+          </a:p>
+          <a:p>
+            <a:r>
+              <a:rPr lang="en-US" sz="1200" b="0" kern="1200" dirty="0" smtClean="0">
+                <a:solidFill>
+                  <a:schemeClr val="tx1"/>
+                </a:solidFill>
+                <a:effectLst/>
+                <a:latin typeface="+mn-lt"/>
+                <a:ea typeface="+mn-ea"/>
+                <a:cs typeface="+mn-cs"/>
+              </a:rPr>
+              <a:t>  stage: build</a:t>
+            </a:r>
+          </a:p>
+          <a:p>
+            <a:r>
+              <a:rPr lang="en-US" sz="1200" b="0" kern="1200" dirty="0" smtClean="0">
+                <a:solidFill>
+                  <a:schemeClr val="tx1"/>
+                </a:solidFill>
+                <a:effectLst/>
+                <a:latin typeface="+mn-lt"/>
+                <a:ea typeface="+mn-ea"/>
+                <a:cs typeface="+mn-cs"/>
+              </a:rPr>
+              <a:t>  script:</a:t>
+            </a:r>
+          </a:p>
+          <a:p>
+            <a:r>
+              <a:rPr lang="en-US" sz="1200" b="0" kern="1200" dirty="0" smtClean="0">
+                <a:solidFill>
+                  <a:schemeClr val="tx1"/>
+                </a:solidFill>
+                <a:effectLst/>
+                <a:latin typeface="+mn-lt"/>
+                <a:ea typeface="+mn-ea"/>
+                <a:cs typeface="+mn-cs"/>
+              </a:rPr>
+              <a:t>    - echo "build c"</a:t>
+            </a:r>
+          </a:p>
+          <a:p>
+            <a:r>
+              <a:rPr lang="en-US" sz="1200" b="0" kern="1200" dirty="0" smtClean="0">
+                <a:solidFill>
+                  <a:schemeClr val="tx1"/>
+                </a:solidFill>
+                <a:effectLst/>
+                <a:latin typeface="+mn-lt"/>
+                <a:ea typeface="+mn-ea"/>
+                <a:cs typeface="+mn-cs"/>
+              </a:rPr>
+              <a:t/>
+            </a:r>
+            <a:br>
+              <a:rPr lang="en-US" sz="1200" b="0" kern="1200" dirty="0" smtClean="0">
+                <a:solidFill>
+                  <a:schemeClr val="tx1"/>
+                </a:solidFill>
+                <a:effectLst/>
+                <a:latin typeface="+mn-lt"/>
+                <a:ea typeface="+mn-ea"/>
+                <a:cs typeface="+mn-cs"/>
+              </a:rPr>
+            </a:br>
+            <a:r>
+              <a:rPr lang="en-US" sz="1200" b="0" kern="1200" dirty="0" err="1" smtClean="0">
+                <a:solidFill>
+                  <a:schemeClr val="tx1"/>
+                </a:solidFill>
+                <a:effectLst/>
+                <a:latin typeface="+mn-lt"/>
+                <a:ea typeface="+mn-ea"/>
+                <a:cs typeface="+mn-cs"/>
+              </a:rPr>
+              <a:t>test_a</a:t>
+            </a:r>
+            <a:r>
+              <a:rPr lang="en-US" sz="1200" b="0" kern="1200" dirty="0" smtClean="0">
+                <a:solidFill>
+                  <a:schemeClr val="tx1"/>
+                </a:solidFill>
+                <a:effectLst/>
+                <a:latin typeface="+mn-lt"/>
+                <a:ea typeface="+mn-ea"/>
+                <a:cs typeface="+mn-cs"/>
+              </a:rPr>
+              <a:t>:</a:t>
+            </a:r>
+          </a:p>
+          <a:p>
+            <a:r>
+              <a:rPr lang="en-US" sz="1200" b="0" kern="1200" dirty="0" smtClean="0">
+                <a:solidFill>
+                  <a:schemeClr val="tx1"/>
+                </a:solidFill>
+                <a:effectLst/>
+                <a:latin typeface="+mn-lt"/>
+                <a:ea typeface="+mn-ea"/>
+                <a:cs typeface="+mn-cs"/>
+              </a:rPr>
+              <a:t>  stage: stage</a:t>
+            </a:r>
+          </a:p>
+          <a:p>
+            <a:r>
+              <a:rPr lang="en-US" sz="1200" b="0" kern="1200" dirty="0" smtClean="0">
+                <a:solidFill>
+                  <a:schemeClr val="tx1"/>
+                </a:solidFill>
+                <a:effectLst/>
+                <a:latin typeface="+mn-lt"/>
+                <a:ea typeface="+mn-ea"/>
+                <a:cs typeface="+mn-cs"/>
+              </a:rPr>
+              <a:t>  needs: [</a:t>
+            </a:r>
+            <a:r>
+              <a:rPr lang="en-US" sz="1200" b="0" kern="1200" dirty="0" err="1" smtClean="0">
+                <a:solidFill>
+                  <a:schemeClr val="tx1"/>
+                </a:solidFill>
+                <a:effectLst/>
+                <a:latin typeface="+mn-lt"/>
+                <a:ea typeface="+mn-ea"/>
+                <a:cs typeface="+mn-cs"/>
+              </a:rPr>
+              <a:t>build_a,build_b</a:t>
+            </a:r>
+            <a:r>
+              <a:rPr lang="en-US" sz="1200" b="0" kern="1200" dirty="0" smtClean="0">
+                <a:solidFill>
+                  <a:schemeClr val="tx1"/>
+                </a:solidFill>
+                <a:effectLst/>
+                <a:latin typeface="+mn-lt"/>
+                <a:ea typeface="+mn-ea"/>
+                <a:cs typeface="+mn-cs"/>
+              </a:rPr>
+              <a:t>]</a:t>
+            </a:r>
+          </a:p>
+          <a:p>
+            <a:r>
+              <a:rPr lang="en-US" sz="1200" b="0" kern="1200" dirty="0" smtClean="0">
+                <a:solidFill>
+                  <a:schemeClr val="tx1"/>
+                </a:solidFill>
+                <a:effectLst/>
+                <a:latin typeface="+mn-lt"/>
+                <a:ea typeface="+mn-ea"/>
+                <a:cs typeface="+mn-cs"/>
+              </a:rPr>
+              <a:t>  script:</a:t>
+            </a:r>
+          </a:p>
+          <a:p>
+            <a:r>
+              <a:rPr lang="en-US" sz="1200" b="0" kern="1200" dirty="0" smtClean="0">
+                <a:solidFill>
+                  <a:schemeClr val="tx1"/>
+                </a:solidFill>
+                <a:effectLst/>
+                <a:latin typeface="+mn-lt"/>
+                <a:ea typeface="+mn-ea"/>
+                <a:cs typeface="+mn-cs"/>
+              </a:rPr>
+              <a:t>    - echo "stage a"</a:t>
+            </a:r>
+          </a:p>
+          <a:p>
+            <a:r>
+              <a:rPr lang="en-US" sz="1200" b="0" kern="1200" dirty="0" smtClean="0">
+                <a:solidFill>
+                  <a:schemeClr val="tx1"/>
+                </a:solidFill>
+                <a:effectLst/>
+                <a:latin typeface="+mn-lt"/>
+                <a:ea typeface="+mn-ea"/>
+                <a:cs typeface="+mn-cs"/>
+              </a:rPr>
+              <a:t/>
+            </a:r>
+            <a:br>
+              <a:rPr lang="en-US" sz="1200" b="0" kern="1200" dirty="0" smtClean="0">
+                <a:solidFill>
+                  <a:schemeClr val="tx1"/>
+                </a:solidFill>
+                <a:effectLst/>
+                <a:latin typeface="+mn-lt"/>
+                <a:ea typeface="+mn-ea"/>
+                <a:cs typeface="+mn-cs"/>
+              </a:rPr>
+            </a:br>
+            <a:r>
+              <a:rPr lang="en-US" sz="1200" b="0" kern="1200" dirty="0" err="1" smtClean="0">
+                <a:solidFill>
+                  <a:schemeClr val="tx1"/>
+                </a:solidFill>
+                <a:effectLst/>
+                <a:latin typeface="+mn-lt"/>
+                <a:ea typeface="+mn-ea"/>
+                <a:cs typeface="+mn-cs"/>
+              </a:rPr>
+              <a:t>test_b</a:t>
+            </a:r>
+            <a:r>
+              <a:rPr lang="en-US" sz="1200" b="0" kern="1200" dirty="0" smtClean="0">
+                <a:solidFill>
+                  <a:schemeClr val="tx1"/>
+                </a:solidFill>
+                <a:effectLst/>
+                <a:latin typeface="+mn-lt"/>
+                <a:ea typeface="+mn-ea"/>
+                <a:cs typeface="+mn-cs"/>
+              </a:rPr>
+              <a:t>:</a:t>
+            </a:r>
+          </a:p>
+          <a:p>
+            <a:r>
+              <a:rPr lang="en-US" sz="1200" b="0" kern="1200" dirty="0" smtClean="0">
+                <a:solidFill>
+                  <a:schemeClr val="tx1"/>
+                </a:solidFill>
+                <a:effectLst/>
+                <a:latin typeface="+mn-lt"/>
+                <a:ea typeface="+mn-ea"/>
+                <a:cs typeface="+mn-cs"/>
+              </a:rPr>
+              <a:t>  stage: stage</a:t>
+            </a:r>
+          </a:p>
+          <a:p>
+            <a:r>
+              <a:rPr lang="en-US" sz="1200" b="0" kern="1200" dirty="0" smtClean="0">
+                <a:solidFill>
+                  <a:schemeClr val="tx1"/>
+                </a:solidFill>
+                <a:effectLst/>
+                <a:latin typeface="+mn-lt"/>
+                <a:ea typeface="+mn-ea"/>
+                <a:cs typeface="+mn-cs"/>
+              </a:rPr>
+              <a:t>  script:</a:t>
+            </a:r>
+          </a:p>
+          <a:p>
+            <a:r>
+              <a:rPr lang="en-US" sz="1200" b="0" kern="1200" dirty="0" smtClean="0">
+                <a:solidFill>
+                  <a:schemeClr val="tx1"/>
+                </a:solidFill>
+                <a:effectLst/>
+                <a:latin typeface="+mn-lt"/>
+                <a:ea typeface="+mn-ea"/>
+                <a:cs typeface="+mn-cs"/>
+              </a:rPr>
+              <a:t>    - echo "stage b"</a:t>
+            </a:r>
+          </a:p>
+          <a:p>
+            <a:r>
+              <a:rPr lang="en-US" sz="1200" b="0" kern="1200" dirty="0" smtClean="0">
+                <a:solidFill>
+                  <a:schemeClr val="tx1"/>
+                </a:solidFill>
+                <a:effectLst/>
+                <a:latin typeface="+mn-lt"/>
+                <a:ea typeface="+mn-ea"/>
+                <a:cs typeface="+mn-cs"/>
+              </a:rPr>
+              <a:t/>
+            </a:r>
+            <a:br>
+              <a:rPr lang="en-US" sz="1200" b="0" kern="1200" dirty="0" smtClean="0">
+                <a:solidFill>
+                  <a:schemeClr val="tx1"/>
+                </a:solidFill>
+                <a:effectLst/>
+                <a:latin typeface="+mn-lt"/>
+                <a:ea typeface="+mn-ea"/>
+                <a:cs typeface="+mn-cs"/>
+              </a:rPr>
+            </a:br>
+            <a:r>
+              <a:rPr lang="en-US" sz="1200" b="0" kern="1200" dirty="0" err="1" smtClean="0">
+                <a:solidFill>
+                  <a:schemeClr val="tx1"/>
+                </a:solidFill>
+                <a:effectLst/>
+                <a:latin typeface="+mn-lt"/>
+                <a:ea typeface="+mn-ea"/>
+                <a:cs typeface="+mn-cs"/>
+              </a:rPr>
+              <a:t>deploy_a</a:t>
+            </a:r>
+            <a:r>
+              <a:rPr lang="en-US" sz="1200" b="0" kern="1200" dirty="0" smtClean="0">
+                <a:solidFill>
+                  <a:schemeClr val="tx1"/>
+                </a:solidFill>
+                <a:effectLst/>
+                <a:latin typeface="+mn-lt"/>
+                <a:ea typeface="+mn-ea"/>
+                <a:cs typeface="+mn-cs"/>
+              </a:rPr>
+              <a:t>:</a:t>
+            </a:r>
+          </a:p>
+          <a:p>
+            <a:r>
+              <a:rPr lang="en-US" sz="1200" b="0" kern="1200" dirty="0" smtClean="0">
+                <a:solidFill>
+                  <a:schemeClr val="tx1"/>
+                </a:solidFill>
+                <a:effectLst/>
+                <a:latin typeface="+mn-lt"/>
+                <a:ea typeface="+mn-ea"/>
+                <a:cs typeface="+mn-cs"/>
+              </a:rPr>
+              <a:t>  stage: stage</a:t>
+            </a:r>
+          </a:p>
+          <a:p>
+            <a:r>
+              <a:rPr lang="en-US" sz="1200" b="0" kern="1200" dirty="0" smtClean="0">
+                <a:solidFill>
+                  <a:schemeClr val="tx1"/>
+                </a:solidFill>
+                <a:effectLst/>
+                <a:latin typeface="+mn-lt"/>
+                <a:ea typeface="+mn-ea"/>
+                <a:cs typeface="+mn-cs"/>
+              </a:rPr>
+              <a:t>  needs: [</a:t>
+            </a:r>
+            <a:r>
+              <a:rPr lang="en-US" sz="1200" b="0" kern="1200" dirty="0" err="1" smtClean="0">
+                <a:solidFill>
+                  <a:schemeClr val="tx1"/>
+                </a:solidFill>
+                <a:effectLst/>
+                <a:latin typeface="+mn-lt"/>
+                <a:ea typeface="+mn-ea"/>
+                <a:cs typeface="+mn-cs"/>
+              </a:rPr>
+              <a:t>test_a,test_b</a:t>
+            </a:r>
+            <a:r>
+              <a:rPr lang="en-US" sz="1200" b="0" kern="1200" dirty="0" smtClean="0">
+                <a:solidFill>
+                  <a:schemeClr val="tx1"/>
+                </a:solidFill>
+                <a:effectLst/>
+                <a:latin typeface="+mn-lt"/>
+                <a:ea typeface="+mn-ea"/>
+                <a:cs typeface="+mn-cs"/>
+              </a:rPr>
+              <a:t>]</a:t>
+            </a:r>
+          </a:p>
+          <a:p>
+            <a:r>
+              <a:rPr lang="en-US" sz="1200" b="0" kern="1200" dirty="0" smtClean="0">
+                <a:solidFill>
+                  <a:schemeClr val="tx1"/>
+                </a:solidFill>
+                <a:effectLst/>
+                <a:latin typeface="+mn-lt"/>
+                <a:ea typeface="+mn-ea"/>
+                <a:cs typeface="+mn-cs"/>
+              </a:rPr>
+              <a:t>  script:</a:t>
+            </a:r>
+          </a:p>
+          <a:p>
+            <a:r>
+              <a:rPr lang="en-US" sz="1200" b="0" kern="1200" dirty="0" smtClean="0">
+                <a:solidFill>
+                  <a:schemeClr val="tx1"/>
+                </a:solidFill>
+                <a:effectLst/>
+                <a:latin typeface="+mn-lt"/>
+                <a:ea typeface="+mn-ea"/>
+                <a:cs typeface="+mn-cs"/>
+              </a:rPr>
+              <a:t>    - echo "deploy a"</a:t>
+            </a:r>
+          </a:p>
+          <a:p>
+            <a:r>
+              <a:rPr lang="en-US" sz="1200" b="0" kern="1200" dirty="0" smtClean="0">
+                <a:solidFill>
+                  <a:schemeClr val="tx1"/>
+                </a:solidFill>
+                <a:effectLst/>
+                <a:latin typeface="+mn-lt"/>
+                <a:ea typeface="+mn-ea"/>
+                <a:cs typeface="+mn-cs"/>
+              </a:rPr>
+              <a:t/>
+            </a:r>
+            <a:br>
+              <a:rPr lang="en-US" sz="1200" b="0" kern="1200" dirty="0" smtClean="0">
+                <a:solidFill>
+                  <a:schemeClr val="tx1"/>
+                </a:solidFill>
+                <a:effectLst/>
+                <a:latin typeface="+mn-lt"/>
+                <a:ea typeface="+mn-ea"/>
+                <a:cs typeface="+mn-cs"/>
+              </a:rPr>
+            </a:br>
+            <a:r>
+              <a:rPr lang="en-US" sz="1200" b="0" kern="1200" dirty="0" err="1" smtClean="0">
+                <a:solidFill>
+                  <a:schemeClr val="tx1"/>
+                </a:solidFill>
+                <a:effectLst/>
+                <a:latin typeface="+mn-lt"/>
+                <a:ea typeface="+mn-ea"/>
+                <a:cs typeface="+mn-cs"/>
+              </a:rPr>
+              <a:t>deploy_b</a:t>
+            </a:r>
+            <a:r>
+              <a:rPr lang="en-US" sz="1200" b="0" kern="1200" dirty="0" smtClean="0">
+                <a:solidFill>
+                  <a:schemeClr val="tx1"/>
+                </a:solidFill>
+                <a:effectLst/>
+                <a:latin typeface="+mn-lt"/>
+                <a:ea typeface="+mn-ea"/>
+                <a:cs typeface="+mn-cs"/>
+              </a:rPr>
+              <a:t>:</a:t>
+            </a:r>
+          </a:p>
+          <a:p>
+            <a:r>
+              <a:rPr lang="en-US" sz="1200" b="0" kern="1200" dirty="0" smtClean="0">
+                <a:solidFill>
+                  <a:schemeClr val="tx1"/>
+                </a:solidFill>
+                <a:effectLst/>
+                <a:latin typeface="+mn-lt"/>
+                <a:ea typeface="+mn-ea"/>
+                <a:cs typeface="+mn-cs"/>
+              </a:rPr>
+              <a:t>  stage: stage</a:t>
+            </a:r>
+          </a:p>
+          <a:p>
+            <a:r>
+              <a:rPr lang="en-US" sz="1200" b="0" kern="1200" dirty="0" smtClean="0">
+                <a:solidFill>
+                  <a:schemeClr val="tx1"/>
+                </a:solidFill>
+                <a:effectLst/>
+                <a:latin typeface="+mn-lt"/>
+                <a:ea typeface="+mn-ea"/>
+                <a:cs typeface="+mn-cs"/>
+              </a:rPr>
+              <a:t>  script:</a:t>
+            </a:r>
+          </a:p>
+          <a:p>
+            <a:r>
+              <a:rPr lang="en-US" sz="1200" b="0" kern="1200" dirty="0" smtClean="0">
+                <a:solidFill>
+                  <a:schemeClr val="tx1"/>
+                </a:solidFill>
+                <a:effectLst/>
+                <a:latin typeface="+mn-lt"/>
+                <a:ea typeface="+mn-ea"/>
+                <a:cs typeface="+mn-cs"/>
+              </a:rPr>
+              <a:t>    - echo "deploy b"</a:t>
+            </a:r>
+          </a:p>
+          <a:p>
+            <a:r>
+              <a:rPr lang="en-US" sz="1200" b="0" kern="1200" dirty="0" smtClean="0">
+                <a:solidFill>
+                  <a:schemeClr val="tx1"/>
+                </a:solidFill>
+                <a:effectLst/>
+                <a:latin typeface="+mn-lt"/>
+                <a:ea typeface="+mn-ea"/>
+                <a:cs typeface="+mn-cs"/>
+              </a:rPr>
+              <a:t/>
+            </a:r>
+            <a:br>
+              <a:rPr lang="en-US" sz="1200" b="0" kern="1200" dirty="0" smtClean="0">
+                <a:solidFill>
+                  <a:schemeClr val="tx1"/>
+                </a:solidFill>
+                <a:effectLst/>
+                <a:latin typeface="+mn-lt"/>
+                <a:ea typeface="+mn-ea"/>
+                <a:cs typeface="+mn-cs"/>
+              </a:rPr>
+            </a:br>
+            <a:endParaRPr lang="en-US" sz="1200" b="0" kern="1200" dirty="0" smtClean="0">
+              <a:solidFill>
+                <a:schemeClr val="tx1"/>
+              </a:solidFill>
+              <a:effectLst/>
+              <a:latin typeface="+mn-lt"/>
+              <a:ea typeface="+mn-ea"/>
+              <a:cs typeface="+mn-cs"/>
+            </a:endParaRPr>
+          </a:p>
+          <a:p>
+            <a:endParaRPr lang="en-US" dirty="0"/>
+          </a:p>
+        </p:txBody>
+      </p:sp>
+      <p:sp>
+        <p:nvSpPr>
+          <p:cNvPr id="4" name="Slide Number Placeholder 3"/>
+          <p:cNvSpPr>
+            <a:spLocks noGrp="1"/>
+          </p:cNvSpPr>
+          <p:nvPr>
+            <p:ph type="sldNum" sz="quarter" idx="10"/>
+          </p:nvPr>
+        </p:nvSpPr>
+        <p:spPr/>
+        <p:txBody>
+          <a:bodyPr/>
+          <a:lstStyle/>
+          <a:p>
+            <a:fld id="{508E1986-C91B-477C-93E3-239B6FF79C49}" type="slidenum">
+              <a:rPr lang="fr-FR" smtClean="0"/>
+              <a:t>30</a:t>
+            </a:fld>
+            <a:endParaRPr lang="fr-FR"/>
+          </a:p>
+        </p:txBody>
+      </p:sp>
+    </p:spTree>
+    <p:extLst>
+      <p:ext uri="{BB962C8B-B14F-4D97-AF65-F5344CB8AC3E}">
+        <p14:creationId xmlns:p14="http://schemas.microsoft.com/office/powerpoint/2010/main" val="2321776320"/>
+      </p:ext>
+    </p:extLst>
+  </p:cSld>
+  <p:clrMapOvr>
+    <a:masterClrMapping/>
+  </p:clrMapOvr>
+</p:notes>
+</file>
+
 <file path=ppt/notesSlides/notesSlide2.xml><?xml version="1.0" encoding="utf-8"?>
 <p:notes xmlns:a="http://schemas.openxmlformats.org/drawingml/2006/main" xmlns:r="http://schemas.openxmlformats.org/officeDocument/2006/relationships" xmlns:p="http://schemas.openxmlformats.org/presentationml/2006/main">
   <p:cSld>
@@ -4459,806 +5430,303 @@
           <a:lstStyle/>
           <a:p>
             <a:r>
-              <a:rPr lang="en-US" sz="1200" b="0" kern="1200" dirty="0" smtClean="0">
-                <a:solidFill>
-                  <a:schemeClr val="tx1"/>
-                </a:solidFill>
-                <a:effectLst/>
-                <a:latin typeface="+mn-lt"/>
-                <a:ea typeface="+mn-ea"/>
-                <a:cs typeface="+mn-cs"/>
-              </a:rPr>
+              <a:rPr lang="fr-FR" b="1" dirty="0" err="1" smtClean="0"/>
+              <a:t>delayed</a:t>
+            </a:r>
+            <a:r>
+              <a:rPr lang="fr-FR" b="1" dirty="0" smtClean="0"/>
+              <a:t>:</a:t>
+            </a:r>
+            <a:endParaRPr lang="en-US" b="1" dirty="0" smtClean="0"/>
+          </a:p>
+          <a:p>
+            <a:r>
+              <a:rPr lang="en-US" dirty="0" err="1" smtClean="0"/>
+              <a:t>deploy_delayed</a:t>
+            </a:r>
+            <a:r>
+              <a:rPr lang="en-US" dirty="0" smtClean="0"/>
+              <a:t>:</a:t>
+            </a:r>
+            <a:br>
+              <a:rPr lang="en-US" dirty="0" smtClean="0"/>
+            </a:br>
+            <a:r>
+              <a:rPr lang="en-US" dirty="0" smtClean="0"/>
+              <a:t>stage: deploy</a:t>
+            </a:r>
+            <a:br>
+              <a:rPr lang="en-US" dirty="0" smtClean="0"/>
+            </a:br>
+            <a:r>
+              <a:rPr lang="en-US" dirty="0" smtClean="0"/>
+              <a:t>script:</a:t>
+            </a:r>
+            <a:br>
+              <a:rPr lang="en-US" dirty="0" smtClean="0"/>
+            </a:br>
+            <a:r>
+              <a:rPr lang="en-US" dirty="0" smtClean="0"/>
+              <a:t>- echo "</a:t>
+            </a:r>
+            <a:r>
+              <a:rPr lang="en-US" dirty="0" err="1" smtClean="0"/>
+              <a:t>Déploiement</a:t>
+            </a:r>
+            <a:r>
+              <a:rPr lang="en-US" dirty="0" smtClean="0"/>
+              <a:t> </a:t>
+            </a:r>
+            <a:r>
+              <a:rPr lang="en-US" dirty="0" err="1" smtClean="0"/>
+              <a:t>lancé</a:t>
+            </a:r>
+            <a:r>
+              <a:rPr lang="en-US" dirty="0" smtClean="0"/>
+              <a:t> après </a:t>
+            </a:r>
+            <a:r>
+              <a:rPr lang="en-US" dirty="0" err="1" smtClean="0"/>
+              <a:t>délai</a:t>
+            </a:r>
+            <a:r>
+              <a:rPr lang="en-US" dirty="0" smtClean="0"/>
+              <a:t>"</a:t>
+            </a:r>
+            <a:br>
+              <a:rPr lang="en-US" dirty="0" smtClean="0"/>
+            </a:br>
+            <a:r>
+              <a:rPr lang="en-US" dirty="0" smtClean="0"/>
+              <a:t>when: delayed</a:t>
+            </a:r>
+            <a:br>
+              <a:rPr lang="en-US" dirty="0" smtClean="0"/>
+            </a:br>
+            <a:r>
+              <a:rPr lang="en-US" dirty="0" err="1" smtClean="0"/>
+              <a:t>start_in</a:t>
+            </a:r>
+            <a:r>
+              <a:rPr lang="en-US" dirty="0" smtClean="0"/>
+              <a:t>: 5 minutes</a:t>
+            </a:r>
+          </a:p>
+          <a:p>
+            <a:endParaRPr lang="fr-FR" dirty="0" smtClean="0"/>
+          </a:p>
+          <a:p>
+            <a:r>
+              <a:rPr lang="fr-FR" b="1" dirty="0" err="1" smtClean="0"/>
+              <a:t>never</a:t>
+            </a:r>
+            <a:r>
+              <a:rPr lang="fr-FR" b="1" dirty="0" smtClean="0"/>
+              <a:t>: </a:t>
+            </a:r>
+          </a:p>
+          <a:p>
+            <a:r>
+              <a:rPr lang="en-US" dirty="0" err="1" smtClean="0"/>
+              <a:t>test_job</a:t>
+            </a:r>
+            <a:r>
+              <a:rPr lang="en-US" dirty="0" smtClean="0"/>
+              <a:t>:</a:t>
+            </a:r>
+            <a:br>
+              <a:rPr lang="en-US" dirty="0" smtClean="0"/>
+            </a:br>
+            <a:r>
+              <a:rPr lang="en-US" dirty="0" smtClean="0"/>
+              <a:t>stage: test</a:t>
+            </a:r>
+            <a:br>
+              <a:rPr lang="en-US" dirty="0" smtClean="0"/>
+            </a:br>
+            <a:r>
+              <a:rPr lang="en-US" dirty="0" smtClean="0"/>
+              <a:t>script:</a:t>
+            </a:r>
+            <a:br>
+              <a:rPr lang="en-US" dirty="0" smtClean="0"/>
+            </a:br>
+            <a:r>
+              <a:rPr lang="en-US" dirty="0" smtClean="0"/>
+              <a:t>- echo "Je ne </a:t>
+            </a:r>
+            <a:r>
+              <a:rPr lang="en-US" dirty="0" err="1" smtClean="0"/>
+              <a:t>dois</a:t>
+            </a:r>
+            <a:r>
+              <a:rPr lang="en-US" dirty="0" smtClean="0"/>
+              <a:t> pas </a:t>
+            </a:r>
+            <a:r>
+              <a:rPr lang="en-US" dirty="0" err="1" smtClean="0"/>
+              <a:t>tourner</a:t>
+            </a:r>
+            <a:r>
+              <a:rPr lang="en-US" dirty="0" smtClean="0"/>
+              <a:t> sur main"</a:t>
+            </a:r>
+            <a:br>
+              <a:rPr lang="en-US" dirty="0" smtClean="0"/>
+            </a:br>
+            <a:r>
+              <a:rPr lang="en-US" dirty="0" smtClean="0"/>
+              <a:t>rules:</a:t>
+            </a:r>
+            <a:br>
+              <a:rPr lang="en-US" dirty="0" smtClean="0"/>
+            </a:br>
+            <a:r>
+              <a:rPr lang="en-US" dirty="0" smtClean="0"/>
+              <a:t>- if: '$CI_COMMIT_BRANCH == "main"'</a:t>
+            </a:r>
+            <a:br>
+              <a:rPr lang="en-US" dirty="0" smtClean="0"/>
+            </a:br>
+            <a:r>
+              <a:rPr lang="en-US" dirty="0" smtClean="0"/>
+              <a:t>- when: never</a:t>
+            </a:r>
+            <a:br>
+              <a:rPr lang="en-US" dirty="0" smtClean="0"/>
+            </a:br>
+            <a:r>
+              <a:rPr lang="en-US" dirty="0" smtClean="0"/>
+              <a:t>- when: </a:t>
+            </a:r>
+            <a:r>
+              <a:rPr lang="en-US" dirty="0" err="1" smtClean="0"/>
+              <a:t>on_success</a:t>
+            </a:r>
+            <a:endParaRPr lang="en-US" dirty="0" smtClean="0"/>
+          </a:p>
+          <a:p>
+            <a:endParaRPr lang="fr-FR" dirty="0" smtClean="0"/>
+          </a:p>
+          <a:p>
+            <a:r>
+              <a:rPr lang="fr-FR" b="1" dirty="0" err="1" smtClean="0"/>
+              <a:t>always</a:t>
+            </a:r>
+            <a:r>
+              <a:rPr lang="fr-FR" b="1" dirty="0" smtClean="0"/>
+              <a:t>: </a:t>
+            </a:r>
+          </a:p>
+          <a:p>
+            <a:endParaRPr lang="fr-FR" b="0" dirty="0" smtClean="0"/>
+          </a:p>
+          <a:p>
+            <a:r>
+              <a:rPr lang="en-US" dirty="0" smtClean="0"/>
               <a:t>stages:</a:t>
             </a:r>
-          </a:p>
-          <a:p>
-            <a:r>
-              <a:rPr lang="en-US" sz="1200" b="0" kern="1200" dirty="0" smtClean="0">
-                <a:solidFill>
-                  <a:schemeClr val="tx1"/>
-                </a:solidFill>
-                <a:effectLst/>
-                <a:latin typeface="+mn-lt"/>
-                <a:ea typeface="+mn-ea"/>
-                <a:cs typeface="+mn-cs"/>
-              </a:rPr>
-              <a:t>  - build</a:t>
-            </a:r>
-          </a:p>
-          <a:p>
-            <a:r>
-              <a:rPr lang="en-US" sz="1200" b="0" kern="1200" dirty="0" smtClean="0">
-                <a:solidFill>
-                  <a:schemeClr val="tx1"/>
-                </a:solidFill>
-                <a:effectLst/>
-                <a:latin typeface="+mn-lt"/>
-                <a:ea typeface="+mn-ea"/>
-                <a:cs typeface="+mn-cs"/>
-              </a:rPr>
-              <a:t>  - stage</a:t>
-            </a:r>
-          </a:p>
-          <a:p>
-            <a:r>
-              <a:rPr lang="en-US" sz="1200" b="0" kern="1200" dirty="0" smtClean="0">
-                <a:solidFill>
-                  <a:schemeClr val="tx1"/>
-                </a:solidFill>
-                <a:effectLst/>
-                <a:latin typeface="+mn-lt"/>
-                <a:ea typeface="+mn-ea"/>
-                <a:cs typeface="+mn-cs"/>
-              </a:rPr>
-              <a:t>  - deploy</a:t>
-            </a:r>
-          </a:p>
-          <a:p>
-            <a:r>
-              <a:rPr lang="en-US" sz="1200" b="0" kern="1200" dirty="0" smtClean="0">
-                <a:solidFill>
-                  <a:schemeClr val="tx1"/>
-                </a:solidFill>
-                <a:effectLst/>
-                <a:latin typeface="+mn-lt"/>
-                <a:ea typeface="+mn-ea"/>
-                <a:cs typeface="+mn-cs"/>
-              </a:rPr>
-              <a:t/>
-            </a:r>
             <a:br>
-              <a:rPr lang="en-US" sz="1200" b="0" kern="1200" dirty="0" smtClean="0">
-                <a:solidFill>
-                  <a:schemeClr val="tx1"/>
-                </a:solidFill>
-                <a:effectLst/>
-                <a:latin typeface="+mn-lt"/>
-                <a:ea typeface="+mn-ea"/>
-                <a:cs typeface="+mn-cs"/>
-              </a:rPr>
+              <a:rPr lang="en-US" dirty="0" smtClean="0"/>
             </a:br>
             <a:r>
-              <a:rPr lang="en-US" sz="1200" b="0" kern="1200" dirty="0" err="1" smtClean="0">
-                <a:solidFill>
-                  <a:schemeClr val="tx1"/>
-                </a:solidFill>
-                <a:effectLst/>
-                <a:latin typeface="+mn-lt"/>
-                <a:ea typeface="+mn-ea"/>
-                <a:cs typeface="+mn-cs"/>
-              </a:rPr>
-              <a:t>build_a</a:t>
-            </a:r>
-            <a:r>
-              <a:rPr lang="en-US" sz="1200" b="0" kern="1200" dirty="0" smtClean="0">
-                <a:solidFill>
-                  <a:schemeClr val="tx1"/>
-                </a:solidFill>
-                <a:effectLst/>
-                <a:latin typeface="+mn-lt"/>
-                <a:ea typeface="+mn-ea"/>
-                <a:cs typeface="+mn-cs"/>
-              </a:rPr>
+              <a:rPr lang="en-US" dirty="0" smtClean="0"/>
+              <a:t>- build</a:t>
+            </a:r>
+            <a:br>
+              <a:rPr lang="en-US" dirty="0" smtClean="0"/>
+            </a:br>
+            <a:r>
+              <a:rPr lang="en-US" dirty="0" smtClean="0"/>
+              <a:t>- notify</a:t>
+            </a:r>
+          </a:p>
+          <a:p>
+            <a:endParaRPr lang="fr-FR" b="0" dirty="0" smtClean="0"/>
+          </a:p>
+          <a:p>
+            <a:r>
+              <a:rPr lang="en-US" dirty="0" err="1" smtClean="0"/>
+              <a:t>build_job</a:t>
+            </a:r>
+            <a:r>
+              <a:rPr lang="en-US" dirty="0" smtClean="0"/>
               <a:t>:</a:t>
             </a:r>
-          </a:p>
-          <a:p>
-            <a:r>
-              <a:rPr lang="en-US" sz="1200" b="0" kern="1200" dirty="0" smtClean="0">
-                <a:solidFill>
-                  <a:schemeClr val="tx1"/>
-                </a:solidFill>
-                <a:effectLst/>
-                <a:latin typeface="+mn-lt"/>
-                <a:ea typeface="+mn-ea"/>
-                <a:cs typeface="+mn-cs"/>
-              </a:rPr>
-              <a:t>  stage: build</a:t>
-            </a:r>
-          </a:p>
-          <a:p>
-            <a:r>
-              <a:rPr lang="en-US" sz="1200" b="0" kern="1200" dirty="0" smtClean="0">
-                <a:solidFill>
-                  <a:schemeClr val="tx1"/>
-                </a:solidFill>
-                <a:effectLst/>
-                <a:latin typeface="+mn-lt"/>
-                <a:ea typeface="+mn-ea"/>
-                <a:cs typeface="+mn-cs"/>
-              </a:rPr>
-              <a:t>  script:</a:t>
-            </a:r>
-          </a:p>
-          <a:p>
-            <a:r>
-              <a:rPr lang="en-US" sz="1200" b="0" kern="1200" dirty="0" smtClean="0">
-                <a:solidFill>
-                  <a:schemeClr val="tx1"/>
-                </a:solidFill>
-                <a:effectLst/>
-                <a:latin typeface="+mn-lt"/>
-                <a:ea typeface="+mn-ea"/>
-                <a:cs typeface="+mn-cs"/>
-              </a:rPr>
-              <a:t>    - echo "build a"</a:t>
-            </a:r>
-          </a:p>
-          <a:p>
-            <a:r>
-              <a:rPr lang="en-US" sz="1200" b="0" kern="1200" dirty="0" smtClean="0">
-                <a:solidFill>
-                  <a:schemeClr val="tx1"/>
-                </a:solidFill>
-                <a:effectLst/>
-                <a:latin typeface="+mn-lt"/>
-                <a:ea typeface="+mn-ea"/>
-                <a:cs typeface="+mn-cs"/>
-              </a:rPr>
-              <a:t/>
-            </a:r>
             <a:br>
-              <a:rPr lang="en-US" sz="1200" b="0" kern="1200" dirty="0" smtClean="0">
-                <a:solidFill>
-                  <a:schemeClr val="tx1"/>
-                </a:solidFill>
-                <a:effectLst/>
-                <a:latin typeface="+mn-lt"/>
-                <a:ea typeface="+mn-ea"/>
-                <a:cs typeface="+mn-cs"/>
-              </a:rPr>
+              <a:rPr lang="en-US" dirty="0" smtClean="0"/>
             </a:br>
             <a:r>
-              <a:rPr lang="en-US" sz="1200" b="0" kern="1200" dirty="0" err="1" smtClean="0">
-                <a:solidFill>
-                  <a:schemeClr val="tx1"/>
-                </a:solidFill>
-                <a:effectLst/>
-                <a:latin typeface="+mn-lt"/>
-                <a:ea typeface="+mn-ea"/>
-                <a:cs typeface="+mn-cs"/>
-              </a:rPr>
-              <a:t>build_b</a:t>
-            </a:r>
-            <a:r>
-              <a:rPr lang="en-US" sz="1200" b="0" kern="1200" dirty="0" smtClean="0">
-                <a:solidFill>
-                  <a:schemeClr val="tx1"/>
-                </a:solidFill>
-                <a:effectLst/>
-                <a:latin typeface="+mn-lt"/>
-                <a:ea typeface="+mn-ea"/>
-                <a:cs typeface="+mn-cs"/>
-              </a:rPr>
+              <a:rPr lang="en-US" dirty="0" smtClean="0"/>
+              <a:t>stage: build</a:t>
+            </a:r>
+            <a:br>
+              <a:rPr lang="en-US" dirty="0" smtClean="0"/>
+            </a:br>
+            <a:r>
+              <a:rPr lang="en-US" dirty="0" smtClean="0"/>
+              <a:t>script:</a:t>
+            </a:r>
+            <a:br>
+              <a:rPr lang="en-US" dirty="0" smtClean="0"/>
+            </a:br>
+            <a:r>
+              <a:rPr lang="en-US" dirty="0" smtClean="0"/>
+              <a:t>- exit 1</a:t>
+            </a:r>
+          </a:p>
+          <a:p>
+            <a:endParaRPr lang="fr-FR" b="0" dirty="0" smtClean="0"/>
+          </a:p>
+          <a:p>
+            <a:r>
+              <a:rPr lang="en-US" dirty="0" err="1" smtClean="0"/>
+              <a:t>notify_job</a:t>
+            </a:r>
+            <a:r>
+              <a:rPr lang="en-US" dirty="0" smtClean="0"/>
               <a:t>:</a:t>
             </a:r>
-          </a:p>
-          <a:p>
-            <a:r>
-              <a:rPr lang="en-US" sz="1200" b="0" kern="1200" dirty="0" smtClean="0">
-                <a:solidFill>
-                  <a:schemeClr val="tx1"/>
-                </a:solidFill>
-                <a:effectLst/>
-                <a:latin typeface="+mn-lt"/>
-                <a:ea typeface="+mn-ea"/>
-                <a:cs typeface="+mn-cs"/>
-              </a:rPr>
-              <a:t>  stage: build</a:t>
-            </a:r>
-          </a:p>
-          <a:p>
-            <a:r>
-              <a:rPr lang="en-US" sz="1200" b="0" kern="1200" dirty="0" smtClean="0">
-                <a:solidFill>
-                  <a:schemeClr val="tx1"/>
-                </a:solidFill>
-                <a:effectLst/>
-                <a:latin typeface="+mn-lt"/>
-                <a:ea typeface="+mn-ea"/>
-                <a:cs typeface="+mn-cs"/>
-              </a:rPr>
-              <a:t>  script:</a:t>
-            </a:r>
-          </a:p>
-          <a:p>
-            <a:r>
-              <a:rPr lang="en-US" sz="1200" b="0" kern="1200" dirty="0" smtClean="0">
-                <a:solidFill>
-                  <a:schemeClr val="tx1"/>
-                </a:solidFill>
-                <a:effectLst/>
-                <a:latin typeface="+mn-lt"/>
-                <a:ea typeface="+mn-ea"/>
-                <a:cs typeface="+mn-cs"/>
-              </a:rPr>
-              <a:t>    - echo "build b"</a:t>
-            </a:r>
-          </a:p>
-          <a:p>
-            <a:r>
-              <a:rPr lang="en-US" sz="1200" b="0" kern="1200" dirty="0" smtClean="0">
-                <a:solidFill>
-                  <a:schemeClr val="tx1"/>
-                </a:solidFill>
-                <a:effectLst/>
-                <a:latin typeface="+mn-lt"/>
-                <a:ea typeface="+mn-ea"/>
-                <a:cs typeface="+mn-cs"/>
-              </a:rPr>
-              <a:t/>
-            </a:r>
             <a:br>
-              <a:rPr lang="en-US" sz="1200" b="0" kern="1200" dirty="0" smtClean="0">
-                <a:solidFill>
-                  <a:schemeClr val="tx1"/>
-                </a:solidFill>
-                <a:effectLst/>
-                <a:latin typeface="+mn-lt"/>
-                <a:ea typeface="+mn-ea"/>
-                <a:cs typeface="+mn-cs"/>
-              </a:rPr>
+              <a:rPr lang="en-US" dirty="0" smtClean="0"/>
             </a:br>
             <a:r>
-              <a:rPr lang="en-US" sz="1200" b="0" kern="1200" dirty="0" err="1" smtClean="0">
-                <a:solidFill>
-                  <a:schemeClr val="tx1"/>
-                </a:solidFill>
-                <a:effectLst/>
-                <a:latin typeface="+mn-lt"/>
-                <a:ea typeface="+mn-ea"/>
-                <a:cs typeface="+mn-cs"/>
-              </a:rPr>
-              <a:t>build_c</a:t>
-            </a:r>
-            <a:r>
-              <a:rPr lang="en-US" sz="1200" b="0" kern="1200" dirty="0" smtClean="0">
-                <a:solidFill>
-                  <a:schemeClr val="tx1"/>
-                </a:solidFill>
-                <a:effectLst/>
-                <a:latin typeface="+mn-lt"/>
-                <a:ea typeface="+mn-ea"/>
-                <a:cs typeface="+mn-cs"/>
-              </a:rPr>
-              <a:t>:</a:t>
-            </a:r>
-          </a:p>
-          <a:p>
-            <a:r>
-              <a:rPr lang="en-US" sz="1200" b="0" kern="1200" dirty="0" smtClean="0">
-                <a:solidFill>
-                  <a:schemeClr val="tx1"/>
-                </a:solidFill>
-                <a:effectLst/>
-                <a:latin typeface="+mn-lt"/>
-                <a:ea typeface="+mn-ea"/>
-                <a:cs typeface="+mn-cs"/>
-              </a:rPr>
-              <a:t>  stage: build</a:t>
-            </a:r>
-          </a:p>
-          <a:p>
-            <a:r>
-              <a:rPr lang="en-US" sz="1200" b="0" kern="1200" dirty="0" smtClean="0">
-                <a:solidFill>
-                  <a:schemeClr val="tx1"/>
-                </a:solidFill>
-                <a:effectLst/>
-                <a:latin typeface="+mn-lt"/>
-                <a:ea typeface="+mn-ea"/>
-                <a:cs typeface="+mn-cs"/>
-              </a:rPr>
-              <a:t>  script:</a:t>
-            </a:r>
-          </a:p>
-          <a:p>
-            <a:r>
-              <a:rPr lang="en-US" sz="1200" b="0" kern="1200" dirty="0" smtClean="0">
-                <a:solidFill>
-                  <a:schemeClr val="tx1"/>
-                </a:solidFill>
-                <a:effectLst/>
-                <a:latin typeface="+mn-lt"/>
-                <a:ea typeface="+mn-ea"/>
-                <a:cs typeface="+mn-cs"/>
-              </a:rPr>
-              <a:t>    - echo "build c"</a:t>
-            </a:r>
-          </a:p>
-          <a:p>
-            <a:r>
-              <a:rPr lang="en-US" sz="1200" b="0" kern="1200" dirty="0" smtClean="0">
-                <a:solidFill>
-                  <a:schemeClr val="tx1"/>
-                </a:solidFill>
-                <a:effectLst/>
-                <a:latin typeface="+mn-lt"/>
-                <a:ea typeface="+mn-ea"/>
-                <a:cs typeface="+mn-cs"/>
-              </a:rPr>
-              <a:t/>
+              <a:rPr lang="en-US" dirty="0" smtClean="0"/>
+              <a:t>stage: notify</a:t>
             </a:r>
             <a:br>
-              <a:rPr lang="en-US" sz="1200" b="0" kern="1200" dirty="0" smtClean="0">
-                <a:solidFill>
-                  <a:schemeClr val="tx1"/>
-                </a:solidFill>
-                <a:effectLst/>
-                <a:latin typeface="+mn-lt"/>
-                <a:ea typeface="+mn-ea"/>
-                <a:cs typeface="+mn-cs"/>
-              </a:rPr>
+              <a:rPr lang="en-US" dirty="0" smtClean="0"/>
             </a:br>
             <a:r>
-              <a:rPr lang="en-US" sz="1200" b="0" kern="1200" dirty="0" err="1" smtClean="0">
-                <a:solidFill>
-                  <a:schemeClr val="tx1"/>
-                </a:solidFill>
-                <a:effectLst/>
-                <a:latin typeface="+mn-lt"/>
-                <a:ea typeface="+mn-ea"/>
-                <a:cs typeface="+mn-cs"/>
-              </a:rPr>
-              <a:t>test_a</a:t>
-            </a:r>
-            <a:r>
-              <a:rPr lang="en-US" sz="1200" b="0" kern="1200" dirty="0" smtClean="0">
-                <a:solidFill>
-                  <a:schemeClr val="tx1"/>
-                </a:solidFill>
-                <a:effectLst/>
-                <a:latin typeface="+mn-lt"/>
-                <a:ea typeface="+mn-ea"/>
-                <a:cs typeface="+mn-cs"/>
-              </a:rPr>
-              <a:t>:</a:t>
-            </a:r>
-          </a:p>
-          <a:p>
-            <a:r>
-              <a:rPr lang="en-US" sz="1200" b="0" kern="1200" dirty="0" smtClean="0">
-                <a:solidFill>
-                  <a:schemeClr val="tx1"/>
-                </a:solidFill>
-                <a:effectLst/>
-                <a:latin typeface="+mn-lt"/>
-                <a:ea typeface="+mn-ea"/>
-                <a:cs typeface="+mn-cs"/>
-              </a:rPr>
-              <a:t>  stage: stage</a:t>
-            </a:r>
-          </a:p>
-          <a:p>
-            <a:r>
-              <a:rPr lang="en-US" sz="1200" b="0" kern="1200" dirty="0" smtClean="0">
-                <a:solidFill>
-                  <a:schemeClr val="tx1"/>
-                </a:solidFill>
-                <a:effectLst/>
-                <a:latin typeface="+mn-lt"/>
-                <a:ea typeface="+mn-ea"/>
-                <a:cs typeface="+mn-cs"/>
-              </a:rPr>
-              <a:t>  needs: [</a:t>
-            </a:r>
-            <a:r>
-              <a:rPr lang="en-US" sz="1200" b="0" kern="1200" dirty="0" err="1" smtClean="0">
-                <a:solidFill>
-                  <a:schemeClr val="tx1"/>
-                </a:solidFill>
-                <a:effectLst/>
-                <a:latin typeface="+mn-lt"/>
-                <a:ea typeface="+mn-ea"/>
-                <a:cs typeface="+mn-cs"/>
-              </a:rPr>
-              <a:t>build_a,build_b</a:t>
-            </a:r>
-            <a:r>
-              <a:rPr lang="en-US" sz="1200" b="0" kern="1200" dirty="0" smtClean="0">
-                <a:solidFill>
-                  <a:schemeClr val="tx1"/>
-                </a:solidFill>
-                <a:effectLst/>
-                <a:latin typeface="+mn-lt"/>
-                <a:ea typeface="+mn-ea"/>
-                <a:cs typeface="+mn-cs"/>
-              </a:rPr>
-              <a:t>]</a:t>
-            </a:r>
-          </a:p>
-          <a:p>
-            <a:r>
-              <a:rPr lang="en-US" sz="1200" b="0" kern="1200" dirty="0" smtClean="0">
-                <a:solidFill>
-                  <a:schemeClr val="tx1"/>
-                </a:solidFill>
-                <a:effectLst/>
-                <a:latin typeface="+mn-lt"/>
-                <a:ea typeface="+mn-ea"/>
-                <a:cs typeface="+mn-cs"/>
-              </a:rPr>
-              <a:t>  script:</a:t>
-            </a:r>
-          </a:p>
-          <a:p>
-            <a:r>
-              <a:rPr lang="en-US" sz="1200" b="0" kern="1200" dirty="0" smtClean="0">
-                <a:solidFill>
-                  <a:schemeClr val="tx1"/>
-                </a:solidFill>
-                <a:effectLst/>
-                <a:latin typeface="+mn-lt"/>
-                <a:ea typeface="+mn-ea"/>
-                <a:cs typeface="+mn-cs"/>
-              </a:rPr>
-              <a:t>    - echo "stage a"</a:t>
-            </a:r>
-          </a:p>
-          <a:p>
-            <a:r>
-              <a:rPr lang="en-US" sz="1200" b="0" kern="1200" dirty="0" smtClean="0">
-                <a:solidFill>
-                  <a:schemeClr val="tx1"/>
-                </a:solidFill>
-                <a:effectLst/>
-                <a:latin typeface="+mn-lt"/>
-                <a:ea typeface="+mn-ea"/>
-                <a:cs typeface="+mn-cs"/>
-              </a:rPr>
-              <a:t/>
+              <a:rPr lang="en-US" dirty="0" smtClean="0"/>
+              <a:t>script:</a:t>
             </a:r>
             <a:br>
-              <a:rPr lang="en-US" sz="1200" b="0" kern="1200" dirty="0" smtClean="0">
-                <a:solidFill>
-                  <a:schemeClr val="tx1"/>
-                </a:solidFill>
-                <a:effectLst/>
-                <a:latin typeface="+mn-lt"/>
-                <a:ea typeface="+mn-ea"/>
-                <a:cs typeface="+mn-cs"/>
-              </a:rPr>
+              <a:rPr lang="en-US" dirty="0" smtClean="0"/>
             </a:br>
             <a:r>
-              <a:rPr lang="en-US" sz="1200" b="0" kern="1200" dirty="0" err="1" smtClean="0">
-                <a:solidFill>
-                  <a:schemeClr val="tx1"/>
-                </a:solidFill>
-                <a:effectLst/>
-                <a:latin typeface="+mn-lt"/>
-                <a:ea typeface="+mn-ea"/>
-                <a:cs typeface="+mn-cs"/>
-              </a:rPr>
-              <a:t>test_b</a:t>
-            </a:r>
-            <a:r>
-              <a:rPr lang="en-US" sz="1200" b="0" kern="1200" dirty="0" smtClean="0">
-                <a:solidFill>
-                  <a:schemeClr val="tx1"/>
-                </a:solidFill>
-                <a:effectLst/>
-                <a:latin typeface="+mn-lt"/>
-                <a:ea typeface="+mn-ea"/>
-                <a:cs typeface="+mn-cs"/>
-              </a:rPr>
-              <a:t>:</a:t>
-            </a:r>
-          </a:p>
-          <a:p>
-            <a:r>
-              <a:rPr lang="en-US" sz="1200" b="0" kern="1200" dirty="0" smtClean="0">
-                <a:solidFill>
-                  <a:schemeClr val="tx1"/>
-                </a:solidFill>
-                <a:effectLst/>
-                <a:latin typeface="+mn-lt"/>
-                <a:ea typeface="+mn-ea"/>
-                <a:cs typeface="+mn-cs"/>
-              </a:rPr>
-              <a:t>  stage: stage</a:t>
-            </a:r>
-          </a:p>
-          <a:p>
-            <a:r>
-              <a:rPr lang="en-US" sz="1200" b="0" kern="1200" dirty="0" smtClean="0">
-                <a:solidFill>
-                  <a:schemeClr val="tx1"/>
-                </a:solidFill>
-                <a:effectLst/>
-                <a:latin typeface="+mn-lt"/>
-                <a:ea typeface="+mn-ea"/>
-                <a:cs typeface="+mn-cs"/>
-              </a:rPr>
-              <a:t>  script:</a:t>
-            </a:r>
-          </a:p>
-          <a:p>
-            <a:r>
-              <a:rPr lang="en-US" sz="1200" b="0" kern="1200" dirty="0" smtClean="0">
-                <a:solidFill>
-                  <a:schemeClr val="tx1"/>
-                </a:solidFill>
-                <a:effectLst/>
-                <a:latin typeface="+mn-lt"/>
-                <a:ea typeface="+mn-ea"/>
-                <a:cs typeface="+mn-cs"/>
-              </a:rPr>
-              <a:t>    - echo "stage b"</a:t>
-            </a:r>
-          </a:p>
-          <a:p>
-            <a:r>
-              <a:rPr lang="en-US" sz="1200" b="0" kern="1200" dirty="0" smtClean="0">
-                <a:solidFill>
-                  <a:schemeClr val="tx1"/>
-                </a:solidFill>
-                <a:effectLst/>
-                <a:latin typeface="+mn-lt"/>
-                <a:ea typeface="+mn-ea"/>
-                <a:cs typeface="+mn-cs"/>
-              </a:rPr>
-              <a:t/>
+              <a:rPr lang="en-US" dirty="0" smtClean="0"/>
+              <a:t>- echo "Notification </a:t>
+            </a:r>
+            <a:r>
+              <a:rPr lang="en-US" dirty="0" err="1" smtClean="0"/>
+              <a:t>envoyée</a:t>
+            </a:r>
+            <a:r>
+              <a:rPr lang="en-US" dirty="0" smtClean="0"/>
+              <a:t>"</a:t>
             </a:r>
             <a:br>
-              <a:rPr lang="en-US" sz="1200" b="0" kern="1200" dirty="0" smtClean="0">
-                <a:solidFill>
-                  <a:schemeClr val="tx1"/>
-                </a:solidFill>
-                <a:effectLst/>
-                <a:latin typeface="+mn-lt"/>
-                <a:ea typeface="+mn-ea"/>
-                <a:cs typeface="+mn-cs"/>
-              </a:rPr>
+              <a:rPr lang="en-US" dirty="0" smtClean="0"/>
             </a:br>
             <a:r>
-              <a:rPr lang="en-US" sz="1200" b="0" kern="1200" dirty="0" err="1" smtClean="0">
-                <a:solidFill>
-                  <a:schemeClr val="tx1"/>
-                </a:solidFill>
-                <a:effectLst/>
-                <a:latin typeface="+mn-lt"/>
-                <a:ea typeface="+mn-ea"/>
-                <a:cs typeface="+mn-cs"/>
-              </a:rPr>
-              <a:t>deploy_a</a:t>
-            </a:r>
-            <a:r>
-              <a:rPr lang="en-US" sz="1200" b="0" kern="1200" dirty="0" smtClean="0">
-                <a:solidFill>
-                  <a:schemeClr val="tx1"/>
-                </a:solidFill>
-                <a:effectLst/>
-                <a:latin typeface="+mn-lt"/>
-                <a:ea typeface="+mn-ea"/>
-                <a:cs typeface="+mn-cs"/>
-              </a:rPr>
-              <a:t>:</a:t>
-            </a:r>
-          </a:p>
-          <a:p>
-            <a:r>
-              <a:rPr lang="en-US" sz="1200" b="0" kern="1200" dirty="0" smtClean="0">
-                <a:solidFill>
-                  <a:schemeClr val="tx1"/>
-                </a:solidFill>
-                <a:effectLst/>
-                <a:latin typeface="+mn-lt"/>
-                <a:ea typeface="+mn-ea"/>
-                <a:cs typeface="+mn-cs"/>
-              </a:rPr>
-              <a:t>  stage: stage</a:t>
-            </a:r>
-          </a:p>
-          <a:p>
-            <a:r>
-              <a:rPr lang="en-US" sz="1200" b="0" kern="1200" dirty="0" smtClean="0">
-                <a:solidFill>
-                  <a:schemeClr val="tx1"/>
-                </a:solidFill>
-                <a:effectLst/>
-                <a:latin typeface="+mn-lt"/>
-                <a:ea typeface="+mn-ea"/>
-                <a:cs typeface="+mn-cs"/>
-              </a:rPr>
-              <a:t>  needs: [</a:t>
-            </a:r>
-            <a:r>
-              <a:rPr lang="en-US" sz="1200" b="0" kern="1200" dirty="0" err="1" smtClean="0">
-                <a:solidFill>
-                  <a:schemeClr val="tx1"/>
-                </a:solidFill>
-                <a:effectLst/>
-                <a:latin typeface="+mn-lt"/>
-                <a:ea typeface="+mn-ea"/>
-                <a:cs typeface="+mn-cs"/>
-              </a:rPr>
-              <a:t>test_a,test_b</a:t>
-            </a:r>
-            <a:r>
-              <a:rPr lang="en-US" sz="1200" b="0" kern="1200" dirty="0" smtClean="0">
-                <a:solidFill>
-                  <a:schemeClr val="tx1"/>
-                </a:solidFill>
-                <a:effectLst/>
-                <a:latin typeface="+mn-lt"/>
-                <a:ea typeface="+mn-ea"/>
-                <a:cs typeface="+mn-cs"/>
-              </a:rPr>
-              <a:t>]</a:t>
-            </a:r>
-          </a:p>
-          <a:p>
-            <a:r>
-              <a:rPr lang="en-US" sz="1200" b="0" kern="1200" dirty="0" smtClean="0">
-                <a:solidFill>
-                  <a:schemeClr val="tx1"/>
-                </a:solidFill>
-                <a:effectLst/>
-                <a:latin typeface="+mn-lt"/>
-                <a:ea typeface="+mn-ea"/>
-                <a:cs typeface="+mn-cs"/>
-              </a:rPr>
-              <a:t>  script:</a:t>
-            </a:r>
-          </a:p>
-          <a:p>
-            <a:r>
-              <a:rPr lang="en-US" sz="1200" b="0" kern="1200" dirty="0" smtClean="0">
-                <a:solidFill>
-                  <a:schemeClr val="tx1"/>
-                </a:solidFill>
-                <a:effectLst/>
-                <a:latin typeface="+mn-lt"/>
-                <a:ea typeface="+mn-ea"/>
-                <a:cs typeface="+mn-cs"/>
-              </a:rPr>
-              <a:t>    - echo "deploy a"</a:t>
-            </a:r>
-          </a:p>
-          <a:p>
-            <a:r>
-              <a:rPr lang="en-US" sz="1200" b="0" kern="1200" dirty="0" smtClean="0">
-                <a:solidFill>
-                  <a:schemeClr val="tx1"/>
-                </a:solidFill>
-                <a:effectLst/>
-                <a:latin typeface="+mn-lt"/>
-                <a:ea typeface="+mn-ea"/>
-                <a:cs typeface="+mn-cs"/>
-              </a:rPr>
-              <a:t/>
-            </a:r>
-            <a:br>
-              <a:rPr lang="en-US" sz="1200" b="0" kern="1200" dirty="0" smtClean="0">
-                <a:solidFill>
-                  <a:schemeClr val="tx1"/>
-                </a:solidFill>
-                <a:effectLst/>
-                <a:latin typeface="+mn-lt"/>
-                <a:ea typeface="+mn-ea"/>
-                <a:cs typeface="+mn-cs"/>
-              </a:rPr>
-            </a:br>
-            <a:r>
-              <a:rPr lang="en-US" sz="1200" b="0" kern="1200" dirty="0" err="1" smtClean="0">
-                <a:solidFill>
-                  <a:schemeClr val="tx1"/>
-                </a:solidFill>
-                <a:effectLst/>
-                <a:latin typeface="+mn-lt"/>
-                <a:ea typeface="+mn-ea"/>
-                <a:cs typeface="+mn-cs"/>
-              </a:rPr>
-              <a:t>deploy_b</a:t>
-            </a:r>
-            <a:r>
-              <a:rPr lang="en-US" sz="1200" b="0" kern="1200" dirty="0" smtClean="0">
-                <a:solidFill>
-                  <a:schemeClr val="tx1"/>
-                </a:solidFill>
-                <a:effectLst/>
-                <a:latin typeface="+mn-lt"/>
-                <a:ea typeface="+mn-ea"/>
-                <a:cs typeface="+mn-cs"/>
-              </a:rPr>
-              <a:t>:</a:t>
-            </a:r>
-          </a:p>
-          <a:p>
-            <a:r>
-              <a:rPr lang="en-US" sz="1200" b="0" kern="1200" dirty="0" smtClean="0">
-                <a:solidFill>
-                  <a:schemeClr val="tx1"/>
-                </a:solidFill>
-                <a:effectLst/>
-                <a:latin typeface="+mn-lt"/>
-                <a:ea typeface="+mn-ea"/>
-                <a:cs typeface="+mn-cs"/>
-              </a:rPr>
-              <a:t>  stage: stage</a:t>
-            </a:r>
-          </a:p>
-          <a:p>
-            <a:r>
-              <a:rPr lang="en-US" sz="1200" b="0" kern="1200" dirty="0" smtClean="0">
-                <a:solidFill>
-                  <a:schemeClr val="tx1"/>
-                </a:solidFill>
-                <a:effectLst/>
-                <a:latin typeface="+mn-lt"/>
-                <a:ea typeface="+mn-ea"/>
-                <a:cs typeface="+mn-cs"/>
-              </a:rPr>
-              <a:t>  script:</a:t>
-            </a:r>
-          </a:p>
-          <a:p>
-            <a:r>
-              <a:rPr lang="en-US" sz="1200" b="0" kern="1200" dirty="0" smtClean="0">
-                <a:solidFill>
-                  <a:schemeClr val="tx1"/>
-                </a:solidFill>
-                <a:effectLst/>
-                <a:latin typeface="+mn-lt"/>
-                <a:ea typeface="+mn-ea"/>
-                <a:cs typeface="+mn-cs"/>
-              </a:rPr>
-              <a:t>    - echo "deploy b"</a:t>
-            </a:r>
-          </a:p>
-          <a:p>
-            <a:r>
-              <a:rPr lang="en-US" sz="1200" b="0" kern="1200" dirty="0" smtClean="0">
-                <a:solidFill>
-                  <a:schemeClr val="tx1"/>
-                </a:solidFill>
-                <a:effectLst/>
-                <a:latin typeface="+mn-lt"/>
-                <a:ea typeface="+mn-ea"/>
-                <a:cs typeface="+mn-cs"/>
-              </a:rPr>
-              <a:t/>
-            </a:r>
-            <a:br>
-              <a:rPr lang="en-US" sz="1200" b="0" kern="1200" dirty="0" smtClean="0">
-                <a:solidFill>
-                  <a:schemeClr val="tx1"/>
-                </a:solidFill>
-                <a:effectLst/>
-                <a:latin typeface="+mn-lt"/>
-                <a:ea typeface="+mn-ea"/>
-                <a:cs typeface="+mn-cs"/>
-              </a:rPr>
-            </a:br>
-            <a:endParaRPr lang="en-US" sz="1200" b="0" kern="1200" dirty="0" smtClean="0">
-              <a:solidFill>
-                <a:schemeClr val="tx1"/>
-              </a:solidFill>
-              <a:effectLst/>
-              <a:latin typeface="+mn-lt"/>
-              <a:ea typeface="+mn-ea"/>
-              <a:cs typeface="+mn-cs"/>
-            </a:endParaRPr>
+              <a:rPr lang="en-US" dirty="0" smtClean="0"/>
+              <a:t>when: always</a:t>
+            </a:r>
+            <a:endParaRPr lang="fr-FR" b="0" dirty="0" smtClean="0"/>
+          </a:p>
+          <a:p>
+            <a:endParaRPr lang="fr-FR" b="0" dirty="0" smtClean="0"/>
           </a:p>
           <a:p>
             <a:endParaRPr lang="en-US" dirty="0"/>
@@ -5282,7 +5750,7 @@
           <a:p>
             <a:fld id="{508E1986-C91B-477C-93E3-239B6FF79C49}" type="slidenum">
               <a:rPr lang="fr-FR" smtClean="0"/>
-              <a:t>30</a:t>
+              <a:t>23</a:t>
             </a:fld>
             <a:endParaRPr lang="fr-FR"/>
           </a:p>
@@ -5291,7 +5759,7 @@
     </p:spTree>
     <p:extLst>
       <p:ext uri="{BB962C8B-B14F-4D97-AF65-F5344CB8AC3E}">
-        <p14:creationId xmlns:p14="http://schemas.microsoft.com/office/powerpoint/2010/main" val="2321776320"/>
+        <p14:creationId xmlns:p14="http://schemas.microsoft.com/office/powerpoint/2010/main" val="3201691568"/>
       </p:ext>
     </p:extLst>
   </p:cSld>
@@ -5444,7 +5912,7 @@
           <a:p>
             <a:fld id="{BD18AD39-8054-4B4E-A8CA-E68688617542}" type="datetimeFigureOut">
               <a:rPr lang="fr-FR" smtClean="0"/>
-              <a:t>06/06/2025</a:t>
+              <a:t>07/03/2026</a:t>
             </a:fld>
             <a:endParaRPr lang="fr-FR"/>
           </a:p>
@@ -5652,7 +6120,7 @@
           <a:p>
             <a:fld id="{BD18AD39-8054-4B4E-A8CA-E68688617542}" type="datetimeFigureOut">
               <a:rPr lang="fr-FR" smtClean="0"/>
-              <a:t>06/06/2025</a:t>
+              <a:t>07/03/2026</a:t>
             </a:fld>
             <a:endParaRPr lang="fr-FR"/>
           </a:p>
@@ -5860,7 +6328,7 @@
           <a:p>
             <a:fld id="{BD18AD39-8054-4B4E-A8CA-E68688617542}" type="datetimeFigureOut">
               <a:rPr lang="fr-FR" smtClean="0"/>
-              <a:t>06/06/2025</a:t>
+              <a:t>07/03/2026</a:t>
             </a:fld>
             <a:endParaRPr lang="fr-FR"/>
           </a:p>
@@ -6068,7 +6536,7 @@
           <a:p>
             <a:fld id="{BD18AD39-8054-4B4E-A8CA-E68688617542}" type="datetimeFigureOut">
               <a:rPr lang="fr-FR" smtClean="0"/>
-              <a:t>06/06/2025</a:t>
+              <a:t>07/03/2026</a:t>
             </a:fld>
             <a:endParaRPr lang="fr-FR"/>
           </a:p>
@@ -6350,7 +6818,7 @@
           <a:p>
             <a:fld id="{BD18AD39-8054-4B4E-A8CA-E68688617542}" type="datetimeFigureOut">
               <a:rPr lang="fr-FR" smtClean="0"/>
-              <a:t>06/06/2025</a:t>
+              <a:t>07/03/2026</a:t>
             </a:fld>
             <a:endParaRPr lang="fr-FR"/>
           </a:p>
@@ -6617,7 +7085,7 @@
           <a:p>
             <a:fld id="{BD18AD39-8054-4B4E-A8CA-E68688617542}" type="datetimeFigureOut">
               <a:rPr lang="fr-FR" smtClean="0"/>
-              <a:t>06/06/2025</a:t>
+              <a:t>07/03/2026</a:t>
             </a:fld>
             <a:endParaRPr lang="fr-FR"/>
           </a:p>
@@ -7020,7 +7488,7 @@
           <a:p>
             <a:fld id="{BD18AD39-8054-4B4E-A8CA-E68688617542}" type="datetimeFigureOut">
               <a:rPr lang="fr-FR" smtClean="0"/>
-              <a:t>06/06/2025</a:t>
+              <a:t>07/03/2026</a:t>
             </a:fld>
             <a:endParaRPr lang="fr-FR"/>
           </a:p>
@@ -7169,7 +7637,7 @@
           <a:p>
             <a:fld id="{BD18AD39-8054-4B4E-A8CA-E68688617542}" type="datetimeFigureOut">
               <a:rPr lang="fr-FR" smtClean="0"/>
-              <a:t>06/06/2025</a:t>
+              <a:t>07/03/2026</a:t>
             </a:fld>
             <a:endParaRPr lang="fr-FR"/>
           </a:p>
@@ -7288,7 +7756,7 @@
           <a:p>
             <a:fld id="{BD18AD39-8054-4B4E-A8CA-E68688617542}" type="datetimeFigureOut">
               <a:rPr lang="fr-FR" smtClean="0"/>
-              <a:t>06/06/2025</a:t>
+              <a:t>07/03/2026</a:t>
             </a:fld>
             <a:endParaRPr lang="fr-FR"/>
           </a:p>
@@ -7596,7 +8064,7 @@
           <a:p>
             <a:fld id="{BD18AD39-8054-4B4E-A8CA-E68688617542}" type="datetimeFigureOut">
               <a:rPr lang="fr-FR" smtClean="0"/>
-              <a:t>06/06/2025</a:t>
+              <a:t>07/03/2026</a:t>
             </a:fld>
             <a:endParaRPr lang="fr-FR"/>
           </a:p>
@@ -7881,7 +8349,7 @@
           <a:p>
             <a:fld id="{BD18AD39-8054-4B4E-A8CA-E68688617542}" type="datetimeFigureOut">
               <a:rPr lang="fr-FR" smtClean="0"/>
-              <a:t>06/06/2025</a:t>
+              <a:t>07/03/2026</a:t>
             </a:fld>
             <a:endParaRPr lang="fr-FR"/>
           </a:p>
@@ -17489,22 +17957,30 @@
                 </a:solidFill>
                 <a:latin typeface="GitLab Mono"/>
               </a:rPr>
-              <a:t>    - when: </a:t>
+              <a:t>   </a:t>
             </a:r>
             <a:r>
               <a:rPr lang="en-US" dirty="0">
                 <a:solidFill>
+                  <a:srgbClr val="2E2E2E"/>
+                </a:solidFill>
+                <a:latin typeface="GitLab Mono"/>
+              </a:rPr>
+              <a:t>- when: </a:t>
+            </a:r>
+            <a:r>
+              <a:rPr lang="en-US" dirty="0" smtClean="0">
+                <a:solidFill>
                   <a:srgbClr val="DD1144"/>
                 </a:solidFill>
                 <a:latin typeface="GitLab Mono"/>
               </a:rPr>
               <a:t>manual</a:t>
             </a:r>
-            <a:endParaRPr lang="en-US" b="0" dirty="0">
+            <a:endParaRPr lang="en-US" dirty="0">
               <a:solidFill>
                 <a:srgbClr val="2E2E2E"/>
               </a:solidFill>
-              <a:effectLst/>
               <a:latin typeface="GitLab Mono"/>
             </a:endParaRPr>
           </a:p>
